--- a/curso/pptx/S28.pptx
+++ b/curso/pptx/S28.pptx
@@ -6997,7 +6997,7 @@
                 </a:solidFill>
                 <a:latin typeface="Nunito Sans"/>
               </a:rPr>
-              <a:t>«Todo el mundo lo hace», «millones no pueden equivocarse»</a:t>
+              <a:t>“大家都这么做”，“几百万人不会错”</a:t>
             </a:r>
           </a:p>
           <a:p>
@@ -7022,7 +7022,7 @@
                 </a:solidFill>
                 <a:latin typeface="Nunito Sans"/>
               </a:rPr>
-              <a:t>Que muchos lo crean no es </a:t>
+              <a:t>很多人相信不是</a:t>
             </a:r>
             <a:r>
               <a:rPr sz="2800" b="1">
@@ -7031,7 +7031,7 @@
                 </a:solidFill>
                 <a:latin typeface="Nunito Sans"/>
               </a:rPr>
-              <a:t>prueba</a:t>
+              <a:t>证据</a:t>
             </a:r>
             <a:r>
               <a:rPr sz="2800" b="0">
@@ -7040,7 +7040,7 @@
                 </a:solidFill>
                 <a:latin typeface="Nunito Sans"/>
               </a:rPr>
-              <a:t>: la mayoría también falla</a:t>
+              <a:t>：多数人也会出错</a:t>
             </a:r>
           </a:p>
           <a:p>
@@ -7065,7 +7065,7 @@
                 </a:solidFill>
                 <a:latin typeface="Nunito Sans"/>
               </a:rPr>
-              <a:t>Antes, casi todos creían que el Sol giraba alrededor de la Tierra</a:t>
+              <a:t>以前，几乎所有人都相信太阳绕着地球转</a:t>
             </a:r>
           </a:p>
         </p:txBody>
@@ -7299,7 +7299,7 @@
                 </a:solidFill>
                 <a:latin typeface="Nunito Sans"/>
               </a:rPr>
-              <a:t>Si hay cola, pensamos que algo es bueno</a:t>
+              <a:t>如果有人排队，我们就觉得这东西好</a:t>
             </a:r>
           </a:p>
           <a:p>
@@ -7324,7 +7324,7 @@
                 </a:solidFill>
                 <a:latin typeface="Nunito Sans"/>
               </a:rPr>
-              <a:t>Si tiene muchos «me gusta», nos parece verdad</a:t>
+              <a:t>如果有很多“赞”，我们就觉得它是真的</a:t>
             </a:r>
           </a:p>
           <a:p>
@@ -7349,7 +7349,7 @@
                 </a:solidFill>
                 <a:latin typeface="Nunito Sans"/>
               </a:rPr>
-              <a:t>A veces ayuda; a veces nos engaña</a:t>
+              <a:t>有时有帮助；有时会骗我们</a:t>
             </a:r>
           </a:p>
         </p:txBody>
@@ -7583,7 +7583,7 @@
                 </a:solidFill>
                 <a:latin typeface="Nunito Sans"/>
               </a:rPr>
-              <a:t>Cuando solo cuenta «me gusta» o visitas</a:t>
+              <a:t>只有“赞”或者浏览量算数的时候</a:t>
             </a:r>
           </a:p>
           <a:p>
@@ -7608,7 +7608,7 @@
                 </a:solidFill>
                 <a:latin typeface="Nunito Sans"/>
               </a:rPr>
-              <a:t>Cuando todos copian 不看笔记</a:t>
+              <a:t>所有人都不看就照抄的时候</a:t>
             </a:r>
           </a:p>
           <a:p>
@@ -7633,7 +7633,7 @@
                 </a:solidFill>
                 <a:latin typeface="Nunito Sans"/>
               </a:rPr>
-              <a:t>Para decidir si algo está </a:t>
+              <a:t>要判断某件事</a:t>
             </a:r>
             <a:r>
               <a:rPr sz="2600" b="1">
@@ -7642,7 +7642,7 @@
                 </a:solidFill>
                 <a:latin typeface="Nunito Sans"/>
               </a:rPr>
-              <a:t>bien</a:t>
+              <a:t>对不对</a:t>
             </a:r>
             <a:r>
               <a:rPr sz="2600" b="0">
@@ -7651,7 +7651,7 @@
                 </a:solidFill>
                 <a:latin typeface="Nunito Sans"/>
               </a:rPr>
-              <a:t>: muchos pueden hacer algo mal</a:t>
+              <a:t>：很多人也可能做错</a:t>
             </a:r>
           </a:p>
         </p:txBody>
@@ -7781,7 +7781,7 @@
                 </a:solidFill>
                 <a:latin typeface="Nunito Sans"/>
               </a:rPr>
-              <a:t>Cuando muchos lo han probado y lo cuentan con detalle</a:t>
+              <a:t>很多人试过，并且讲得很详细的时候</a:t>
             </a:r>
           </a:p>
           <a:p>
@@ -7806,7 +7806,7 @@
                 </a:solidFill>
                 <a:latin typeface="Nunito Sans"/>
               </a:rPr>
-              <a:t>Cuando cada uno lo ha comprobado por su cuenta</a:t>
+              <a:t>每个人都自己检验过的时候</a:t>
             </a:r>
           </a:p>
           <a:p>
@@ -7831,7 +7831,7 @@
                 </a:solidFill>
                 <a:latin typeface="Nunito Sans"/>
               </a:rPr>
-              <a:t>Cuando la mayoría son expertos que miraron pruebas (el consenso, 第26课)</a:t>
+              <a:t>大多数是看过证据的专家的时候（共识，第26课）</a:t>
             </a:r>
           </a:p>
         </p:txBody>

--- a/curso/pptx/S28.pptx
+++ b/curso/pptx/S28.pptx
@@ -4437,7 +4437,7 @@
                 </a:solidFill>
                 <a:latin typeface="Nunito Sans"/>
               </a:rPr>
-              <a:t>Yasmin 想要一双150欧元的运动鞋：“全班都穿。”</a:t>
+              <a:t>一个女孩想要一双150欧元的运动鞋：“全班都穿。”</a:t>
             </a:r>
           </a:p>
         </p:txBody>
@@ -4746,7 +4746,7 @@
                 </a:solidFill>
                 <a:latin typeface="Nunito Sans"/>
               </a:rPr>
-              <a:t>Aitor 在 Aste Nagusia 找地方吃饭。一家酒吧有2000条评价，几乎都说东西好吃（编造的例子）。</a:t>
+              <a:t>一个男孩在 Aste Nagusia 找地方吃饭。一家酒吧有2000条评价，几乎都说东西好吃（编造的例子）。</a:t>
             </a:r>
           </a:p>
         </p:txBody>
@@ -5055,7 +5055,7 @@
                 </a:solidFill>
                 <a:latin typeface="Nunito Sans"/>
               </a:rPr>
-              <a:t>Leire 到了伦敦，问她表姐车是走哪一边的。表姐说：“走左边：这里大家都这样。”</a:t>
+              <a:t>一个女孩到了伦敦，问她表姐车是走哪一边的。表姐说：“走左边：这里大家都这样。”</a:t>
             </a:r>
           </a:p>
         </p:txBody>
@@ -5153,7 +5153,7 @@
                 </a:solidFill>
                 <a:latin typeface="Nunito Sans"/>
               </a:rPr>
-              <a:t>但 Leire 问的不是世界上什么是真的，也不是什么是对的。她问的是习惯是什么。</a:t>
+              <a:t>但这个女孩问的不是世界上什么是真的，也不是什么是对的。她问的是习惯是什么。</a:t>
             </a:r>
           </a:p>
           <a:p>
